--- a/dist/초1/철학·논리·심리·교육·종교/질문과이유/초1_철학·논리·심리·교육·종교_질문과이유_01_질문하고이유말하기.pptx
+++ b/dist/초1/철학·논리·심리·교육·종교/질문과이유/초1_철학·논리·심리·교육·종교_질문과이유_01_질문하고이유말하기.pptx
@@ -119,45 +119,45 @@
   <p:extLst>
     <p:ext uri="{521415D9-36F7-43E2-AB2F-B90AF26B5E84}">
       <p14:sectionLst xmlns:p14="http://schemas.microsoft.com/office/powerpoint/2010/main">
-        <p14:section name="도입" id="{983f2b32-7159-e99d-285d-35ec39e56ca0}">
+        <p14:section name="도입" id="{d85d4b71-be0c-7c83-acda-39630dd7e07e}">
           <p14:sldIdLst>
             <p14:sldId id="256"/>
             <p14:sldId id="257"/>
           </p14:sldIdLst>
         </p14:section>
-        <p14:section name="개념" id="{79a7fac9-dc67-f745-ab3f-f4fe3c1a4012}">
+        <p14:section name="개념" id="{be125fe5-2bae-9b55-3009-1add84b1d679}">
           <p14:sldIdLst>
             <p14:sldId id="258"/>
             <p14:sldId id="259"/>
             <p14:sldId id="261"/>
           </p14:sldIdLst>
         </p14:section>
-        <p14:section name="연습" id="{cd7e6d72-09d9-e085-bcb0-629e581d70c2}">
+        <p14:section name="연습" id="{bb441d23-58f6-1d60-a0a1-df33af603205}">
           <p14:sldIdLst>
             <p14:sldId id="260"/>
             <p14:sldId id="262"/>
             <p14:sldId id="263"/>
           </p14:sldIdLst>
         </p14:section>
-        <p14:section name="개념" id="{75594fb9-14dd-4c0e-4505-5cef251e3b8e}">
+        <p14:section name="개념" id="{445f3c18-efcf-3906-8671-f887142727cf}">
           <p14:sldIdLst/>
         </p14:section>
-        <p14:section name="연습" id="{a698e57b-cc99-fd64-08f8-55e18133a3a7}">
+        <p14:section name="연습" id="{d7828bb7-8ed4-bcd9-da73-28e1a4a5e0ce}">
           <p14:sldIdLst/>
         </p14:section>
-        <p14:section name="확인" id="{8e29d310-cdcd-8eb4-cd28-d2fc2c777150}">
+        <p14:section name="확인" id="{55631790-c9ca-02cb-1afc-55c605f75fa5}">
           <p14:sldIdLst>
             <p14:sldId id="264"/>
             <p14:sldId id="265"/>
             <p14:sldId id="266"/>
           </p14:sldIdLst>
         </p14:section>
-        <p14:section name="정리" id="{9c15e435-e13f-e0be-6d63-30073f6a720e}">
+        <p14:section name="정리" id="{488a4f08-cda2-dc55-9492-8cb45c9edd1e}">
           <p14:sldIdLst>
             <p14:sldId id="267"/>
           </p14:sldIdLst>
         </p14:section>
-        <p14:section name="보충" id="{6f08fbe4-b0ae-62a2-8e9c-991ff04d0e20}">
+        <p14:section name="보충" id="{773b9aa7-d366-35d3-8e16-c7b026250f80}">
           <p14:sldIdLst>
             <p14:sldId id="268"/>
           </p14:sldIdLst>
